--- a/examples/ppt/charts/charts-scatter.pptx
+++ b/examples/ppt/charts/charts-scatter.pptx
@@ -5,15 +5,15 @@
     <p:sldMasterId xmlns:r="http://schemas.openxmlformats.org/officeDocument/2006/relationships" id="2147483648" r:id="rId1"/>
   </p:sldMasterIdLst>
   <p:sldIdLst>
-    <p:sldId id="256" r:id="R6036c67fd47d4403"/>
-    <p:sldId id="257" r:id="R1e40e26c0d8e4466"/>
-    <p:sldId id="258" r:id="R62ec1a52dc6c427b"/>
-    <p:sldId id="259" r:id="R4bb12ce18417407d"/>
-    <p:sldId id="260" r:id="R4b90807ef4e14a81"/>
-    <p:sldId id="261" r:id="R0f3c9b4537a6474e"/>
-    <p:sldId id="262" r:id="Rf9fab46d1e784085"/>
-    <p:sldId id="263" r:id="R7a70ea1a258c468d"/>
-    <p:sldId id="264" r:id="R5faf14e6877b4c6e"/>
+    <p:sldId id="256" r:id="Reea5c90f987949ca"/>
+    <p:sldId id="257" r:id="Re501492ea672444f"/>
+    <p:sldId id="258" r:id="Rcdc8961b5b234bac"/>
+    <p:sldId id="259" r:id="Ra0d3174a28c04791"/>
+    <p:sldId id="260" r:id="Rd406480d72ab41aa"/>
+    <p:sldId id="261" r:id="R8d696edcfb434da9"/>
+    <p:sldId id="262" r:id="Rb4d45884b4874cab"/>
+    <p:sldId id="263" r:id="R6b84b58a570c40a4"/>
+    <p:sldId id="264" r:id="Rbd539e3b23ab4c73"/>
   </p:sldIdLst>
   <p:sldSz cx="12192000" cy="6858000"/>
   <p:notesSz cx="6858000" cy="9144000"/>
@@ -288,7 +288,7 @@
 </file>
 
 <file path=ppt/slideMasters/slideMaster1.xml><?xml version="1.0" encoding="utf-8"?>
-<p:sldMaster xmlns:p="http://schemas.openxmlformats.org/presentationml/2006/main">
+<p:sldMaster xmlns:r="http://schemas.openxmlformats.org/officeDocument/2006/relationships" xmlns:p="http://schemas.openxmlformats.org/presentationml/2006/main">
   <p:cSld>
     <p:spTree>
       <p:nvGrpSpPr>
@@ -2633,9 +2633,6 @@
             <c:v>A</c:v>
           </c:tx>
           <c:spPr>
-            <a:solidFill xmlns:a="http://schemas.openxmlformats.org/drawingml/2006/main">
-              <a:srgbClr val="4472C4"/>
-            </a:solidFill>
             <a:ln xmlns:a="http://schemas.openxmlformats.org/drawingml/2006/main" w="6350">
               <a:solidFill>
                 <a:srgbClr val="000000"/>
@@ -2708,9 +2705,6 @@
             <c:v>B</c:v>
           </c:tx>
           <c:spPr>
-            <a:solidFill xmlns:a="http://schemas.openxmlformats.org/drawingml/2006/main">
-              <a:srgbClr val="ED7D31"/>
-            </a:solidFill>
             <a:ln xmlns:a="http://schemas.openxmlformats.org/drawingml/2006/main" w="6350">
               <a:solidFill>
                 <a:srgbClr val="000000"/>
@@ -4104,9 +4098,6 @@
             <c:v>A</c:v>
           </c:tx>
           <c:spPr>
-            <a:solidFill xmlns:a="http://schemas.openxmlformats.org/drawingml/2006/main">
-              <a:srgbClr val="4472C4"/>
-            </a:solidFill>
             <a:ln xmlns:a="http://schemas.openxmlformats.org/drawingml/2006/main" w="25400">
               <a:solidFill>
                 <a:srgbClr val="4472C4"/>
@@ -4179,9 +4170,6 @@
             <c:v>B</c:v>
           </c:tx>
           <c:spPr>
-            <a:solidFill xmlns:a="http://schemas.openxmlformats.org/drawingml/2006/main">
-              <a:srgbClr val="ED7D31"/>
-            </a:solidFill>
             <a:ln xmlns:a="http://schemas.openxmlformats.org/drawingml/2006/main" w="25400">
               <a:solidFill>
                 <a:srgbClr val="ED7D31"/>
@@ -4534,9 +4522,6 @@
             <c:v>A</c:v>
           </c:tx>
           <c:spPr>
-            <a:solidFill xmlns:a="http://schemas.openxmlformats.org/drawingml/2006/main">
-              <a:srgbClr val="5B9BD5"/>
-            </a:solidFill>
             <a:ln xmlns:a="http://schemas.openxmlformats.org/drawingml/2006/main" w="25400">
               <a:solidFill>
                 <a:srgbClr val="5B9BD5"/>
@@ -4609,9 +4594,6 @@
             <c:v>B</c:v>
           </c:tx>
           <c:spPr>
-            <a:solidFill xmlns:a="http://schemas.openxmlformats.org/drawingml/2006/main">
-              <a:srgbClr val="FF6B6B"/>
-            </a:solidFill>
             <a:ln xmlns:a="http://schemas.openxmlformats.org/drawingml/2006/main" w="25400">
               <a:solidFill>
                 <a:srgbClr val="FF6B6B"/>
@@ -4837,9 +4819,6 @@
             <c:v>A</c:v>
           </c:tx>
           <c:spPr>
-            <a:solidFill xmlns:a="http://schemas.openxmlformats.org/drawingml/2006/main">
-              <a:srgbClr val="2E75B6"/>
-            </a:solidFill>
             <a:ln xmlns:a="http://schemas.openxmlformats.org/drawingml/2006/main" w="25400">
               <a:solidFill>
                 <a:srgbClr val="2E75B6"/>
@@ -4912,9 +4891,6 @@
             <c:v>B</c:v>
           </c:tx>
           <c:spPr>
-            <a:solidFill xmlns:a="http://schemas.openxmlformats.org/drawingml/2006/main">
-              <a:srgbClr val="44546A"/>
-            </a:solidFill>
             <a:ln xmlns:a="http://schemas.openxmlformats.org/drawingml/2006/main" w="25400">
               <a:solidFill>
                 <a:srgbClr val="44546A"/>
@@ -5131,9 +5107,6 @@
             <c:v>Alpha</c:v>
           </c:tx>
           <c:spPr>
-            <a:solidFill xmlns:a="http://schemas.openxmlformats.org/drawingml/2006/main">
-              <a:srgbClr val="C00000"/>
-            </a:solidFill>
             <a:ln xmlns:a="http://schemas.openxmlformats.org/drawingml/2006/main" w="31750">
               <a:solidFill>
                 <a:srgbClr val="C00000"/>
@@ -5212,9 +5185,6 @@
             <c:v>Beta</c:v>
           </c:tx>
           <c:spPr>
-            <a:solidFill xmlns:a="http://schemas.openxmlformats.org/drawingml/2006/main">
-              <a:srgbClr val="2E75B6"/>
-            </a:solidFill>
             <a:ln xmlns:a="http://schemas.openxmlformats.org/drawingml/2006/main" w="19050">
               <a:solidFill>
                 <a:srgbClr val="2E75B6"/>
@@ -5710,9 +5680,11 @@
             <c:v>Rev</c:v>
           </c:tx>
           <c:spPr>
-            <a:solidFill xmlns:a="http://schemas.openxmlformats.org/drawingml/2006/main">
-              <a:srgbClr val="4472C4"/>
-            </a:solidFill>
+            <a:ln xmlns:a="http://schemas.openxmlformats.org/drawingml/2006/main" w="25400">
+              <a:solidFill>
+                <a:srgbClr val="4472C4"/>
+              </a:solidFill>
+            </a:ln>
           </c:spPr>
           <c:xVal>
             <c:numLit>
@@ -5756,9 +5728,11 @@
             <c:v>Cost</c:v>
           </c:tx>
           <c:spPr>
-            <a:solidFill xmlns:a="http://schemas.openxmlformats.org/drawingml/2006/main">
-              <a:srgbClr val="E63946"/>
-            </a:solidFill>
+            <a:ln xmlns:a="http://schemas.openxmlformats.org/drawingml/2006/main" w="25400">
+              <a:solidFill>
+                <a:srgbClr val="E63946"/>
+              </a:solidFill>
+            </a:ln>
           </c:spPr>
           <c:xVal>
             <c:numLit>
@@ -5874,9 +5848,11 @@
             <c:v>Alpha</c:v>
           </c:tx>
           <c:spPr>
-            <a:solidFill xmlns:a="http://schemas.openxmlformats.org/drawingml/2006/main">
-              <a:srgbClr val="4472C4"/>
-            </a:solidFill>
+            <a:ln xmlns:a="http://schemas.openxmlformats.org/drawingml/2006/main" w="25400">
+              <a:solidFill>
+                <a:srgbClr val="4472C4"/>
+              </a:solidFill>
+            </a:ln>
           </c:spPr>
           <c:xVal>
             <c:numLit>
@@ -5920,9 +5896,11 @@
             <c:v>Beta</c:v>
           </c:tx>
           <c:spPr>
-            <a:solidFill xmlns:a="http://schemas.openxmlformats.org/drawingml/2006/main">
-              <a:srgbClr val="E63946"/>
-            </a:solidFill>
+            <a:ln xmlns:a="http://schemas.openxmlformats.org/drawingml/2006/main" w="25400">
+              <a:solidFill>
+                <a:srgbClr val="E63946"/>
+              </a:solidFill>
+            </a:ln>
           </c:spPr>
           <c:xVal>
             <c:numLit>
@@ -7044,7 +7022,7 @@
         </p:xfrm>
         <a:graphic xmlns:a="http://schemas.openxmlformats.org/drawingml/2006/main">
           <a:graphicData uri="http://schemas.openxmlformats.org/drawingml/2006/chart">
-            <c:chart xmlns:r="http://schemas.openxmlformats.org/officeDocument/2006/relationships" xmlns:c="http://schemas.openxmlformats.org/drawingml/2006/chart" r:id="Re2185443a8714f21"/>
+            <c:chart xmlns:r="http://schemas.openxmlformats.org/officeDocument/2006/relationships" xmlns:c="http://schemas.openxmlformats.org/drawingml/2006/chart" r:id="Rb4f37e3308e14b97"/>
           </a:graphicData>
         </a:graphic>
       </p:graphicFrame>
@@ -7060,7 +7038,7 @@
         </p:xfrm>
         <a:graphic xmlns:a="http://schemas.openxmlformats.org/drawingml/2006/main">
           <a:graphicData uri="http://schemas.openxmlformats.org/drawingml/2006/chart">
-            <c:chart xmlns:r="http://schemas.openxmlformats.org/officeDocument/2006/relationships" xmlns:c="http://schemas.openxmlformats.org/drawingml/2006/chart" r:id="Reb3b997aa6044c04"/>
+            <c:chart xmlns:r="http://schemas.openxmlformats.org/officeDocument/2006/relationships" xmlns:c="http://schemas.openxmlformats.org/drawingml/2006/chart" r:id="R3a3d82b485c04884"/>
           </a:graphicData>
         </a:graphic>
       </p:graphicFrame>
@@ -7076,7 +7054,7 @@
         </p:xfrm>
         <a:graphic xmlns:a="http://schemas.openxmlformats.org/drawingml/2006/main">
           <a:graphicData uri="http://schemas.openxmlformats.org/drawingml/2006/chart">
-            <c:chart xmlns:r="http://schemas.openxmlformats.org/officeDocument/2006/relationships" xmlns:c="http://schemas.openxmlformats.org/drawingml/2006/chart" r:id="Rf5a7fe58b9714514"/>
+            <c:chart xmlns:r="http://schemas.openxmlformats.org/officeDocument/2006/relationships" xmlns:c="http://schemas.openxmlformats.org/drawingml/2006/chart" r:id="R7541e704926f4220"/>
           </a:graphicData>
         </a:graphic>
       </p:graphicFrame>
@@ -7092,7 +7070,7 @@
         </p:xfrm>
         <a:graphic xmlns:a="http://schemas.openxmlformats.org/drawingml/2006/main">
           <a:graphicData uri="http://schemas.openxmlformats.org/drawingml/2006/chart">
-            <c:chart xmlns:r="http://schemas.openxmlformats.org/officeDocument/2006/relationships" xmlns:c="http://schemas.openxmlformats.org/drawingml/2006/chart" r:id="R14d4a0b5f2434d0e"/>
+            <c:chart xmlns:r="http://schemas.openxmlformats.org/officeDocument/2006/relationships" xmlns:c="http://schemas.openxmlformats.org/drawingml/2006/chart" r:id="R8603d10699634902"/>
           </a:graphicData>
         </a:graphic>
       </p:graphicFrame>
@@ -7151,7 +7129,7 @@
         </p:xfrm>
         <a:graphic xmlns:a="http://schemas.openxmlformats.org/drawingml/2006/main">
           <a:graphicData uri="http://schemas.openxmlformats.org/drawingml/2006/chart">
-            <c:chart xmlns:r="http://schemas.openxmlformats.org/officeDocument/2006/relationships" xmlns:c="http://schemas.openxmlformats.org/drawingml/2006/chart" r:id="R27ca520ae9cf4e52"/>
+            <c:chart xmlns:r="http://schemas.openxmlformats.org/officeDocument/2006/relationships" xmlns:c="http://schemas.openxmlformats.org/drawingml/2006/chart" r:id="R33c8d30d36734dd7"/>
           </a:graphicData>
         </a:graphic>
       </p:graphicFrame>
@@ -7167,7 +7145,7 @@
         </p:xfrm>
         <a:graphic xmlns:a="http://schemas.openxmlformats.org/drawingml/2006/main">
           <a:graphicData uri="http://schemas.openxmlformats.org/drawingml/2006/chart">
-            <c:chart xmlns:r="http://schemas.openxmlformats.org/officeDocument/2006/relationships" xmlns:c="http://schemas.openxmlformats.org/drawingml/2006/chart" r:id="R8f8319c2bdb14dd2"/>
+            <c:chart xmlns:r="http://schemas.openxmlformats.org/officeDocument/2006/relationships" xmlns:c="http://schemas.openxmlformats.org/drawingml/2006/chart" r:id="R3d8177e79a414de9"/>
           </a:graphicData>
         </a:graphic>
       </p:graphicFrame>
@@ -7183,7 +7161,7 @@
         </p:xfrm>
         <a:graphic xmlns:a="http://schemas.openxmlformats.org/drawingml/2006/main">
           <a:graphicData uri="http://schemas.openxmlformats.org/drawingml/2006/chart">
-            <c:chart xmlns:r="http://schemas.openxmlformats.org/officeDocument/2006/relationships" xmlns:c="http://schemas.openxmlformats.org/drawingml/2006/chart" r:id="R38b093b8c3124b1a"/>
+            <c:chart xmlns:r="http://schemas.openxmlformats.org/officeDocument/2006/relationships" xmlns:c="http://schemas.openxmlformats.org/drawingml/2006/chart" r:id="R34d85b654afb4b04"/>
           </a:graphicData>
         </a:graphic>
       </p:graphicFrame>
@@ -7199,7 +7177,7 @@
         </p:xfrm>
         <a:graphic xmlns:a="http://schemas.openxmlformats.org/drawingml/2006/main">
           <a:graphicData uri="http://schemas.openxmlformats.org/drawingml/2006/chart">
-            <c:chart xmlns:r="http://schemas.openxmlformats.org/officeDocument/2006/relationships" xmlns:c="http://schemas.openxmlformats.org/drawingml/2006/chart" r:id="R98cdc63ea1cc4618"/>
+            <c:chart xmlns:r="http://schemas.openxmlformats.org/officeDocument/2006/relationships" xmlns:c="http://schemas.openxmlformats.org/drawingml/2006/chart" r:id="R59cacc8f78624778"/>
           </a:graphicData>
         </a:graphic>
       </p:graphicFrame>
@@ -7258,7 +7236,7 @@
         </p:xfrm>
         <a:graphic xmlns:a="http://schemas.openxmlformats.org/drawingml/2006/main">
           <a:graphicData uri="http://schemas.openxmlformats.org/drawingml/2006/chart">
-            <c:chart xmlns:r="http://schemas.openxmlformats.org/officeDocument/2006/relationships" xmlns:c="http://schemas.openxmlformats.org/drawingml/2006/chart" r:id="Rc740088ee00444d0"/>
+            <c:chart xmlns:r="http://schemas.openxmlformats.org/officeDocument/2006/relationships" xmlns:c="http://schemas.openxmlformats.org/drawingml/2006/chart" r:id="Rda1d73c4eab74534"/>
           </a:graphicData>
         </a:graphic>
       </p:graphicFrame>
@@ -7274,7 +7252,7 @@
         </p:xfrm>
         <a:graphic xmlns:a="http://schemas.openxmlformats.org/drawingml/2006/main">
           <a:graphicData uri="http://schemas.openxmlformats.org/drawingml/2006/chart">
-            <c:chart xmlns:r="http://schemas.openxmlformats.org/officeDocument/2006/relationships" xmlns:c="http://schemas.openxmlformats.org/drawingml/2006/chart" r:id="R658e29cd4f6a400a"/>
+            <c:chart xmlns:r="http://schemas.openxmlformats.org/officeDocument/2006/relationships" xmlns:c="http://schemas.openxmlformats.org/drawingml/2006/chart" r:id="R10003c7157f140ae"/>
           </a:graphicData>
         </a:graphic>
       </p:graphicFrame>
@@ -7290,7 +7268,7 @@
         </p:xfrm>
         <a:graphic xmlns:a="http://schemas.openxmlformats.org/drawingml/2006/main">
           <a:graphicData uri="http://schemas.openxmlformats.org/drawingml/2006/chart">
-            <c:chart xmlns:r="http://schemas.openxmlformats.org/officeDocument/2006/relationships" xmlns:c="http://schemas.openxmlformats.org/drawingml/2006/chart" r:id="R0c0e6050bbe148d3"/>
+            <c:chart xmlns:r="http://schemas.openxmlformats.org/officeDocument/2006/relationships" xmlns:c="http://schemas.openxmlformats.org/drawingml/2006/chart" r:id="R9c96b713473c455e"/>
           </a:graphicData>
         </a:graphic>
       </p:graphicFrame>
@@ -7306,7 +7284,7 @@
         </p:xfrm>
         <a:graphic xmlns:a="http://schemas.openxmlformats.org/drawingml/2006/main">
           <a:graphicData uri="http://schemas.openxmlformats.org/drawingml/2006/chart">
-            <c:chart xmlns:r="http://schemas.openxmlformats.org/officeDocument/2006/relationships" xmlns:c="http://schemas.openxmlformats.org/drawingml/2006/chart" r:id="Rdfe0cce18bc948c7"/>
+            <c:chart xmlns:r="http://schemas.openxmlformats.org/officeDocument/2006/relationships" xmlns:c="http://schemas.openxmlformats.org/drawingml/2006/chart" r:id="Rb436b9bf88f74d9c"/>
           </a:graphicData>
         </a:graphic>
       </p:graphicFrame>
@@ -7365,7 +7343,7 @@
         </p:xfrm>
         <a:graphic xmlns:a="http://schemas.openxmlformats.org/drawingml/2006/main">
           <a:graphicData uri="http://schemas.openxmlformats.org/drawingml/2006/chart">
-            <c:chart xmlns:r="http://schemas.openxmlformats.org/officeDocument/2006/relationships" xmlns:c="http://schemas.openxmlformats.org/drawingml/2006/chart" r:id="R78175b0696f64ba2"/>
+            <c:chart xmlns:r="http://schemas.openxmlformats.org/officeDocument/2006/relationships" xmlns:c="http://schemas.openxmlformats.org/drawingml/2006/chart" r:id="Rcb44e1623d1b43cf"/>
           </a:graphicData>
         </a:graphic>
       </p:graphicFrame>
@@ -7381,7 +7359,7 @@
         </p:xfrm>
         <a:graphic xmlns:a="http://schemas.openxmlformats.org/drawingml/2006/main">
           <a:graphicData uri="http://schemas.openxmlformats.org/drawingml/2006/chart">
-            <c:chart xmlns:r="http://schemas.openxmlformats.org/officeDocument/2006/relationships" xmlns:c="http://schemas.openxmlformats.org/drawingml/2006/chart" r:id="R70b9072c16c147fd"/>
+            <c:chart xmlns:r="http://schemas.openxmlformats.org/officeDocument/2006/relationships" xmlns:c="http://schemas.openxmlformats.org/drawingml/2006/chart" r:id="R9197963025cb42ea"/>
           </a:graphicData>
         </a:graphic>
       </p:graphicFrame>
@@ -7397,7 +7375,7 @@
         </p:xfrm>
         <a:graphic xmlns:a="http://schemas.openxmlformats.org/drawingml/2006/main">
           <a:graphicData uri="http://schemas.openxmlformats.org/drawingml/2006/chart">
-            <c:chart xmlns:r="http://schemas.openxmlformats.org/officeDocument/2006/relationships" xmlns:c="http://schemas.openxmlformats.org/drawingml/2006/chart" r:id="R65b58170c3fe41a7"/>
+            <c:chart xmlns:r="http://schemas.openxmlformats.org/officeDocument/2006/relationships" xmlns:c="http://schemas.openxmlformats.org/drawingml/2006/chart" r:id="Rad8a0dc32e224b55"/>
           </a:graphicData>
         </a:graphic>
       </p:graphicFrame>
@@ -7413,7 +7391,7 @@
         </p:xfrm>
         <a:graphic xmlns:a="http://schemas.openxmlformats.org/drawingml/2006/main">
           <a:graphicData uri="http://schemas.openxmlformats.org/drawingml/2006/chart">
-            <c:chart xmlns:r="http://schemas.openxmlformats.org/officeDocument/2006/relationships" xmlns:c="http://schemas.openxmlformats.org/drawingml/2006/chart" r:id="Ra21f6b1873194eb2"/>
+            <c:chart xmlns:r="http://schemas.openxmlformats.org/officeDocument/2006/relationships" xmlns:c="http://schemas.openxmlformats.org/drawingml/2006/chart" r:id="R36383a4ec67640c2"/>
           </a:graphicData>
         </a:graphic>
       </p:graphicFrame>
@@ -7472,7 +7450,7 @@
         </p:xfrm>
         <a:graphic xmlns:a="http://schemas.openxmlformats.org/drawingml/2006/main">
           <a:graphicData uri="http://schemas.openxmlformats.org/drawingml/2006/chart">
-            <c:chart xmlns:r="http://schemas.openxmlformats.org/officeDocument/2006/relationships" xmlns:c="http://schemas.openxmlformats.org/drawingml/2006/chart" r:id="R93951c6875584bdc"/>
+            <c:chart xmlns:r="http://schemas.openxmlformats.org/officeDocument/2006/relationships" xmlns:c="http://schemas.openxmlformats.org/drawingml/2006/chart" r:id="R4d205dc85cb542df"/>
           </a:graphicData>
         </a:graphic>
       </p:graphicFrame>
@@ -7488,7 +7466,7 @@
         </p:xfrm>
         <a:graphic xmlns:a="http://schemas.openxmlformats.org/drawingml/2006/main">
           <a:graphicData uri="http://schemas.openxmlformats.org/drawingml/2006/chart">
-            <c:chart xmlns:r="http://schemas.openxmlformats.org/officeDocument/2006/relationships" xmlns:c="http://schemas.openxmlformats.org/drawingml/2006/chart" r:id="R2a2a68740ec94189"/>
+            <c:chart xmlns:r="http://schemas.openxmlformats.org/officeDocument/2006/relationships" xmlns:c="http://schemas.openxmlformats.org/drawingml/2006/chart" r:id="R0bbeb6de66b64e3b"/>
           </a:graphicData>
         </a:graphic>
       </p:graphicFrame>
@@ -7504,7 +7482,7 @@
         </p:xfrm>
         <a:graphic xmlns:a="http://schemas.openxmlformats.org/drawingml/2006/main">
           <a:graphicData uri="http://schemas.openxmlformats.org/drawingml/2006/chart">
-            <c:chart xmlns:r="http://schemas.openxmlformats.org/officeDocument/2006/relationships" xmlns:c="http://schemas.openxmlformats.org/drawingml/2006/chart" r:id="R6e09463b65ce4c71"/>
+            <c:chart xmlns:r="http://schemas.openxmlformats.org/officeDocument/2006/relationships" xmlns:c="http://schemas.openxmlformats.org/drawingml/2006/chart" r:id="R3d94d2085ba34dc3"/>
           </a:graphicData>
         </a:graphic>
       </p:graphicFrame>
@@ -7520,7 +7498,7 @@
         </p:xfrm>
         <a:graphic xmlns:a="http://schemas.openxmlformats.org/drawingml/2006/main">
           <a:graphicData uri="http://schemas.openxmlformats.org/drawingml/2006/chart">
-            <c:chart xmlns:r="http://schemas.openxmlformats.org/officeDocument/2006/relationships" xmlns:c="http://schemas.openxmlformats.org/drawingml/2006/chart" r:id="R0ae1ae7a509340fd"/>
+            <c:chart xmlns:r="http://schemas.openxmlformats.org/officeDocument/2006/relationships" xmlns:c="http://schemas.openxmlformats.org/drawingml/2006/chart" r:id="R31e8c6e340c24a85"/>
           </a:graphicData>
         </a:graphic>
       </p:graphicFrame>
@@ -7579,7 +7557,7 @@
         </p:xfrm>
         <a:graphic xmlns:a="http://schemas.openxmlformats.org/drawingml/2006/main">
           <a:graphicData uri="http://schemas.openxmlformats.org/drawingml/2006/chart">
-            <c:chart xmlns:r="http://schemas.openxmlformats.org/officeDocument/2006/relationships" xmlns:c="http://schemas.openxmlformats.org/drawingml/2006/chart" r:id="R40737791a5974df4"/>
+            <c:chart xmlns:r="http://schemas.openxmlformats.org/officeDocument/2006/relationships" xmlns:c="http://schemas.openxmlformats.org/drawingml/2006/chart" r:id="R45432c982b77445e"/>
           </a:graphicData>
         </a:graphic>
       </p:graphicFrame>
@@ -7595,7 +7573,7 @@
         </p:xfrm>
         <a:graphic xmlns:a="http://schemas.openxmlformats.org/drawingml/2006/main">
           <a:graphicData uri="http://schemas.openxmlformats.org/drawingml/2006/chart">
-            <c:chart xmlns:r="http://schemas.openxmlformats.org/officeDocument/2006/relationships" xmlns:c="http://schemas.openxmlformats.org/drawingml/2006/chart" r:id="R6f33b7d5bdc14b06"/>
+            <c:chart xmlns:r="http://schemas.openxmlformats.org/officeDocument/2006/relationships" xmlns:c="http://schemas.openxmlformats.org/drawingml/2006/chart" r:id="Rbf9ca664ef6245e9"/>
           </a:graphicData>
         </a:graphic>
       </p:graphicFrame>
@@ -7611,7 +7589,7 @@
         </p:xfrm>
         <a:graphic xmlns:a="http://schemas.openxmlformats.org/drawingml/2006/main">
           <a:graphicData uri="http://schemas.openxmlformats.org/drawingml/2006/chart">
-            <c:chart xmlns:r="http://schemas.openxmlformats.org/officeDocument/2006/relationships" xmlns:c="http://schemas.openxmlformats.org/drawingml/2006/chart" r:id="Rbb4bc3dde4f5444a"/>
+            <c:chart xmlns:r="http://schemas.openxmlformats.org/officeDocument/2006/relationships" xmlns:c="http://schemas.openxmlformats.org/drawingml/2006/chart" r:id="Ra482ee8539ee425b"/>
           </a:graphicData>
         </a:graphic>
       </p:graphicFrame>
@@ -7627,7 +7605,7 @@
         </p:xfrm>
         <a:graphic xmlns:a="http://schemas.openxmlformats.org/drawingml/2006/main">
           <a:graphicData uri="http://schemas.openxmlformats.org/drawingml/2006/chart">
-            <c:chart xmlns:r="http://schemas.openxmlformats.org/officeDocument/2006/relationships" xmlns:c="http://schemas.openxmlformats.org/drawingml/2006/chart" r:id="R33010ae86c594e68"/>
+            <c:chart xmlns:r="http://schemas.openxmlformats.org/officeDocument/2006/relationships" xmlns:c="http://schemas.openxmlformats.org/drawingml/2006/chart" r:id="R2c7245e3fa14407e"/>
           </a:graphicData>
         </a:graphic>
       </p:graphicFrame>
@@ -7686,7 +7664,7 @@
         </p:xfrm>
         <a:graphic xmlns:a="http://schemas.openxmlformats.org/drawingml/2006/main">
           <a:graphicData uri="http://schemas.openxmlformats.org/drawingml/2006/chart">
-            <c:chart xmlns:r="http://schemas.openxmlformats.org/officeDocument/2006/relationships" xmlns:c="http://schemas.openxmlformats.org/drawingml/2006/chart" r:id="R9c2eb818594540e7"/>
+            <c:chart xmlns:r="http://schemas.openxmlformats.org/officeDocument/2006/relationships" xmlns:c="http://schemas.openxmlformats.org/drawingml/2006/chart" r:id="R58cffefa80074e9e"/>
           </a:graphicData>
         </a:graphic>
       </p:graphicFrame>
@@ -7702,7 +7680,7 @@
         </p:xfrm>
         <a:graphic xmlns:a="http://schemas.openxmlformats.org/drawingml/2006/main">
           <a:graphicData uri="http://schemas.openxmlformats.org/drawingml/2006/chart">
-            <c:chart xmlns:r="http://schemas.openxmlformats.org/officeDocument/2006/relationships" xmlns:c="http://schemas.openxmlformats.org/drawingml/2006/chart" r:id="Rfe6cbee2d0b5449e"/>
+            <c:chart xmlns:r="http://schemas.openxmlformats.org/officeDocument/2006/relationships" xmlns:c="http://schemas.openxmlformats.org/drawingml/2006/chart" r:id="R8336007c19914792"/>
           </a:graphicData>
         </a:graphic>
       </p:graphicFrame>
@@ -7718,7 +7696,7 @@
         </p:xfrm>
         <a:graphic xmlns:a="http://schemas.openxmlformats.org/drawingml/2006/main">
           <a:graphicData uri="http://schemas.openxmlformats.org/drawingml/2006/chart">
-            <c:chart xmlns:r="http://schemas.openxmlformats.org/officeDocument/2006/relationships" xmlns:c="http://schemas.openxmlformats.org/drawingml/2006/chart" r:id="R28f271cb807c4af1"/>
+            <c:chart xmlns:r="http://schemas.openxmlformats.org/officeDocument/2006/relationships" xmlns:c="http://schemas.openxmlformats.org/drawingml/2006/chart" r:id="R2ba232dae7844e70"/>
           </a:graphicData>
         </a:graphic>
       </p:graphicFrame>
@@ -7734,7 +7712,7 @@
         </p:xfrm>
         <a:graphic xmlns:a="http://schemas.openxmlformats.org/drawingml/2006/main">
           <a:graphicData uri="http://schemas.openxmlformats.org/drawingml/2006/chart">
-            <c:chart xmlns:r="http://schemas.openxmlformats.org/officeDocument/2006/relationships" xmlns:c="http://schemas.openxmlformats.org/drawingml/2006/chart" r:id="R91f00498b9e646d8"/>
+            <c:chart xmlns:r="http://schemas.openxmlformats.org/officeDocument/2006/relationships" xmlns:c="http://schemas.openxmlformats.org/drawingml/2006/chart" r:id="Rcc85e208c5634cc8"/>
           </a:graphicData>
         </a:graphic>
       </p:graphicFrame>
@@ -7793,7 +7771,7 @@
         </p:xfrm>
         <a:graphic xmlns:a="http://schemas.openxmlformats.org/drawingml/2006/main">
           <a:graphicData uri="http://schemas.openxmlformats.org/drawingml/2006/chart">
-            <c:chart xmlns:r="http://schemas.openxmlformats.org/officeDocument/2006/relationships" xmlns:c="http://schemas.openxmlformats.org/drawingml/2006/chart" r:id="R48fe6df9b5434b4e"/>
+            <c:chart xmlns:r="http://schemas.openxmlformats.org/officeDocument/2006/relationships" xmlns:c="http://schemas.openxmlformats.org/drawingml/2006/chart" r:id="Rd5ab533c9fd542d4"/>
           </a:graphicData>
         </a:graphic>
       </p:graphicFrame>
@@ -7809,7 +7787,7 @@
         </p:xfrm>
         <a:graphic xmlns:a="http://schemas.openxmlformats.org/drawingml/2006/main">
           <a:graphicData uri="http://schemas.openxmlformats.org/drawingml/2006/chart">
-            <c:chart xmlns:r="http://schemas.openxmlformats.org/officeDocument/2006/relationships" xmlns:c="http://schemas.openxmlformats.org/drawingml/2006/chart" r:id="Rb144f8f28b564b25"/>
+            <c:chart xmlns:r="http://schemas.openxmlformats.org/officeDocument/2006/relationships" xmlns:c="http://schemas.openxmlformats.org/drawingml/2006/chart" r:id="Rbd2b3d87182e44da"/>
           </a:graphicData>
         </a:graphic>
       </p:graphicFrame>
@@ -7825,7 +7803,7 @@
         </p:xfrm>
         <a:graphic xmlns:a="http://schemas.openxmlformats.org/drawingml/2006/main">
           <a:graphicData uri="http://schemas.openxmlformats.org/drawingml/2006/chart">
-            <c:chart xmlns:r="http://schemas.openxmlformats.org/officeDocument/2006/relationships" xmlns:c="http://schemas.openxmlformats.org/drawingml/2006/chart" r:id="R9ced0b90c9324236"/>
+            <c:chart xmlns:r="http://schemas.openxmlformats.org/officeDocument/2006/relationships" xmlns:c="http://schemas.openxmlformats.org/drawingml/2006/chart" r:id="Rcb131e6bff104018"/>
           </a:graphicData>
         </a:graphic>
       </p:graphicFrame>
@@ -7841,7 +7819,7 @@
         </p:xfrm>
         <a:graphic xmlns:a="http://schemas.openxmlformats.org/drawingml/2006/main">
           <a:graphicData uri="http://schemas.openxmlformats.org/drawingml/2006/chart">
-            <c:chart xmlns:r="http://schemas.openxmlformats.org/officeDocument/2006/relationships" xmlns:c="http://schemas.openxmlformats.org/drawingml/2006/chart" r:id="Rcc9a43065e7f40dd"/>
+            <c:chart xmlns:r="http://schemas.openxmlformats.org/officeDocument/2006/relationships" xmlns:c="http://schemas.openxmlformats.org/drawingml/2006/chart" r:id="Rf617d18d8bc84239"/>
           </a:graphicData>
         </a:graphic>
       </p:graphicFrame>
@@ -7900,7 +7878,7 @@
         </p:xfrm>
         <a:graphic xmlns:a="http://schemas.openxmlformats.org/drawingml/2006/main">
           <a:graphicData uri="http://schemas.openxmlformats.org/drawingml/2006/chart">
-            <c:chart xmlns:r="http://schemas.openxmlformats.org/officeDocument/2006/relationships" xmlns:c="http://schemas.openxmlformats.org/drawingml/2006/chart" r:id="R76f7dc9f04d34e98"/>
+            <c:chart xmlns:r="http://schemas.openxmlformats.org/officeDocument/2006/relationships" xmlns:c="http://schemas.openxmlformats.org/drawingml/2006/chart" r:id="R8a16e36529794fb2"/>
           </a:graphicData>
         </a:graphic>
       </p:graphicFrame>
@@ -7916,7 +7894,7 @@
         </p:xfrm>
         <a:graphic xmlns:a="http://schemas.openxmlformats.org/drawingml/2006/main">
           <a:graphicData uri="http://schemas.openxmlformats.org/drawingml/2006/chart">
-            <c:chart xmlns:r="http://schemas.openxmlformats.org/officeDocument/2006/relationships" xmlns:c="http://schemas.openxmlformats.org/drawingml/2006/chart" r:id="R6376d11d9d994e74"/>
+            <c:chart xmlns:r="http://schemas.openxmlformats.org/officeDocument/2006/relationships" xmlns:c="http://schemas.openxmlformats.org/drawingml/2006/chart" r:id="R41ee1988a5164a73"/>
           </a:graphicData>
         </a:graphic>
       </p:graphicFrame>
@@ -7932,7 +7910,7 @@
         </p:xfrm>
         <a:graphic xmlns:a="http://schemas.openxmlformats.org/drawingml/2006/main">
           <a:graphicData uri="http://schemas.openxmlformats.org/drawingml/2006/chart">
-            <c:chart xmlns:r="http://schemas.openxmlformats.org/officeDocument/2006/relationships" xmlns:c="http://schemas.openxmlformats.org/drawingml/2006/chart" r:id="R4f52b29344c04363"/>
+            <c:chart xmlns:r="http://schemas.openxmlformats.org/officeDocument/2006/relationships" xmlns:c="http://schemas.openxmlformats.org/drawingml/2006/chart" r:id="R42356d96718c41c4"/>
           </a:graphicData>
         </a:graphic>
       </p:graphicFrame>
@@ -7948,7 +7926,7 @@
         </p:xfrm>
         <a:graphic xmlns:a="http://schemas.openxmlformats.org/drawingml/2006/main">
           <a:graphicData uri="http://schemas.openxmlformats.org/drawingml/2006/chart">
-            <c:chart xmlns:r="http://schemas.openxmlformats.org/officeDocument/2006/relationships" xmlns:c="http://schemas.openxmlformats.org/drawingml/2006/chart" r:id="R998cb00d01464188"/>
+            <c:chart xmlns:r="http://schemas.openxmlformats.org/officeDocument/2006/relationships" xmlns:c="http://schemas.openxmlformats.org/drawingml/2006/chart" r:id="Rc8c0493e406d4e14"/>
           </a:graphicData>
         </a:graphic>
       </p:graphicFrame>
